--- a/ppt/Python02-Variables.pptx
+++ b/ppt/Python02-Variables.pptx
@@ -4695,25 +4695,16 @@
           <a:p>
             <a:r>
               <a:rPr lang="fr-FR" dirty="0"/>
-              <a:t>Nouveau en Python 3.6</a:t>
-            </a:r>
-          </a:p>
-          <a:p>
-            <a:pPr lvl="1"/>
-            <a:r>
-              <a:rPr lang="fr-FR" dirty="0"/>
               <a:t>Chaine formatée à partir de variables existantes</a:t>
             </a:r>
           </a:p>
           <a:p>
-            <a:pPr lvl="1"/>
             <a:r>
               <a:rPr lang="en-US" dirty="0"/>
               <a:t>name = "Fred"</a:t>
             </a:r>
           </a:p>
           <a:p>
-            <a:pPr lvl="1"/>
             <a:r>
               <a:rPr lang="en-US" dirty="0" err="1"/>
               <a:t>f"He</a:t>

--- a/ppt/Python02-Variables.pptx
+++ b/ppt/Python02-Variables.pptx
@@ -5,10 +5,10 @@
     <p:sldMasterId id="2147483653" r:id="rId1"/>
   </p:sldMasterIdLst>
   <p:notesMasterIdLst>
-    <p:notesMasterId r:id="rId20"/>
+    <p:notesMasterId r:id="rId17"/>
   </p:notesMasterIdLst>
   <p:handoutMasterIdLst>
-    <p:handoutMasterId r:id="rId21"/>
+    <p:handoutMasterId r:id="rId18"/>
   </p:handoutMasterIdLst>
   <p:sldIdLst>
     <p:sldId id="264" r:id="rId2"/>
@@ -19,16 +19,13 @@
     <p:sldId id="267" r:id="rId7"/>
     <p:sldId id="268" r:id="rId8"/>
     <p:sldId id="269" r:id="rId9"/>
-    <p:sldId id="270" r:id="rId10"/>
-    <p:sldId id="271" r:id="rId11"/>
-    <p:sldId id="275" r:id="rId12"/>
-    <p:sldId id="276" r:id="rId13"/>
-    <p:sldId id="277" r:id="rId14"/>
-    <p:sldId id="278" r:id="rId15"/>
-    <p:sldId id="283" r:id="rId16"/>
-    <p:sldId id="273" r:id="rId17"/>
-    <p:sldId id="280" r:id="rId18"/>
-    <p:sldId id="272" r:id="rId19"/>
+    <p:sldId id="271" r:id="rId10"/>
+    <p:sldId id="275" r:id="rId11"/>
+    <p:sldId id="276" r:id="rId12"/>
+    <p:sldId id="277" r:id="rId13"/>
+    <p:sldId id="278" r:id="rId14"/>
+    <p:sldId id="283" r:id="rId15"/>
+    <p:sldId id="272" r:id="rId16"/>
   </p:sldIdLst>
   <p:sldSz cx="9144000" cy="6858000" type="screen4x3"/>
   <p:notesSz cx="6648450" cy="9782175"/>
@@ -3812,7 +3809,7 @@
           <a:p>
             <a:r>
               <a:rPr lang="fr-FR" dirty="0"/>
-              <a:t>String</a:t>
+              <a:t>Astuces</a:t>
             </a:r>
           </a:p>
         </p:txBody>
@@ -3832,232 +3829,58 @@
           <a:bodyPr/>
           <a:lstStyle/>
           <a:p>
-            <a:pPr>
-              <a:lnSpc>
-                <a:spcPct val="90000"/>
-              </a:lnSpc>
-            </a:pPr>
-            <a:r>
-              <a:rPr lang="en-GB" altLang="fr-FR" dirty="0" err="1"/>
-              <a:t>Une</a:t>
-            </a:r>
-            <a:r>
-              <a:rPr lang="en-GB" altLang="fr-FR" dirty="0"/>
-              <a:t> </a:t>
-            </a:r>
-            <a:r>
-              <a:rPr lang="en-GB" altLang="fr-FR" dirty="0" err="1"/>
-              <a:t>chaîne</a:t>
-            </a:r>
-            <a:r>
-              <a:rPr lang="en-GB" altLang="fr-FR" dirty="0"/>
-              <a:t> </a:t>
-            </a:r>
-            <a:r>
-              <a:rPr lang="en-GB" altLang="fr-FR" dirty="0" err="1"/>
-              <a:t>peut</a:t>
-            </a:r>
-            <a:r>
-              <a:rPr lang="en-GB" altLang="fr-FR" dirty="0"/>
-              <a:t> </a:t>
-            </a:r>
-            <a:r>
-              <a:rPr lang="en-GB" altLang="fr-FR" dirty="0" err="1"/>
-              <a:t>être</a:t>
-            </a:r>
-            <a:r>
-              <a:rPr lang="en-GB" altLang="fr-FR" dirty="0"/>
-              <a:t> </a:t>
-            </a:r>
-            <a:r>
-              <a:rPr lang="en-GB" altLang="fr-FR" dirty="0" err="1"/>
-              <a:t>déclarée</a:t>
-            </a:r>
-            <a:r>
-              <a:rPr lang="en-GB" altLang="fr-FR" dirty="0"/>
-              <a:t> avec un simple guillemet </a:t>
-            </a:r>
-            <a:r>
-              <a:rPr lang="en-GB" altLang="fr-FR" dirty="0" err="1"/>
-              <a:t>ou</a:t>
-            </a:r>
-            <a:r>
-              <a:rPr lang="en-GB" altLang="fr-FR" dirty="0"/>
-              <a:t> un double.</a:t>
-            </a:r>
-          </a:p>
-          <a:p>
-            <a:pPr lvl="1">
-              <a:lnSpc>
-                <a:spcPct val="90000"/>
-              </a:lnSpc>
-            </a:pPr>
-            <a:r>
-              <a:rPr lang="en-GB" altLang="fr-FR" dirty="0"/>
-              <a:t>On utilise le triple double quotes (“”” … “””) pour </a:t>
-            </a:r>
-            <a:r>
-              <a:rPr lang="en-GB" altLang="fr-FR" dirty="0" err="1"/>
-              <a:t>entrer</a:t>
-            </a:r>
-            <a:r>
-              <a:rPr lang="en-GB" altLang="fr-FR" dirty="0"/>
-              <a:t> </a:t>
-            </a:r>
-            <a:r>
-              <a:rPr lang="en-GB" altLang="fr-FR" dirty="0" err="1"/>
-              <a:t>une</a:t>
-            </a:r>
-            <a:r>
-              <a:rPr lang="en-GB" altLang="fr-FR" dirty="0"/>
-              <a:t> </a:t>
-            </a:r>
-            <a:r>
-              <a:rPr lang="en-GB" altLang="fr-FR" dirty="0" err="1"/>
-              <a:t>chaîne</a:t>
-            </a:r>
-            <a:r>
-              <a:rPr lang="en-GB" altLang="fr-FR" dirty="0"/>
-              <a:t> de </a:t>
-            </a:r>
-            <a:r>
-              <a:rPr lang="en-GB" altLang="fr-FR" dirty="0" err="1"/>
-              <a:t>caractère</a:t>
-            </a:r>
-            <a:r>
-              <a:rPr lang="en-GB" altLang="fr-FR" dirty="0"/>
-              <a:t> sur </a:t>
-            </a:r>
-            <a:r>
-              <a:rPr lang="en-GB" altLang="fr-FR" dirty="0" err="1"/>
-              <a:t>plusieurs</a:t>
-            </a:r>
-            <a:r>
-              <a:rPr lang="en-GB" altLang="fr-FR" dirty="0"/>
-              <a:t> </a:t>
-            </a:r>
-            <a:r>
-              <a:rPr lang="en-GB" altLang="fr-FR" dirty="0" err="1"/>
-              <a:t>lignes</a:t>
-            </a:r>
-            <a:endParaRPr lang="en-GB" altLang="fr-FR" dirty="0"/>
-          </a:p>
-          <a:p>
-            <a:pPr>
-              <a:lnSpc>
-                <a:spcPct val="90000"/>
-              </a:lnSpc>
-            </a:pPr>
-            <a:r>
-              <a:rPr lang="en-GB" altLang="fr-FR" dirty="0"/>
-              <a:t>On ne </a:t>
-            </a:r>
-            <a:r>
-              <a:rPr lang="en-GB" altLang="fr-FR" dirty="0" err="1"/>
-              <a:t>déclare</a:t>
-            </a:r>
-            <a:r>
-              <a:rPr lang="en-GB" altLang="fr-FR" dirty="0"/>
-              <a:t> </a:t>
-            </a:r>
-            <a:r>
-              <a:rPr lang="en-GB" altLang="fr-FR" dirty="0" err="1"/>
-              <a:t>donc</a:t>
-            </a:r>
-            <a:r>
-              <a:rPr lang="en-GB" altLang="fr-FR" dirty="0"/>
-              <a:t> pas la </a:t>
-            </a:r>
-            <a:r>
-              <a:rPr lang="en-GB" altLang="fr-FR" dirty="0" err="1"/>
-              <a:t>taille</a:t>
-            </a:r>
-            <a:r>
-              <a:rPr lang="en-GB" altLang="fr-FR" dirty="0"/>
-              <a:t> de la </a:t>
-            </a:r>
-            <a:r>
-              <a:rPr lang="en-GB" altLang="fr-FR" dirty="0" err="1"/>
-              <a:t>chaîne</a:t>
-            </a:r>
-            <a:r>
-              <a:rPr lang="en-GB" altLang="fr-FR" dirty="0"/>
-              <a:t> et pour </a:t>
-            </a:r>
-            <a:r>
-              <a:rPr lang="en-GB" altLang="fr-FR" dirty="0" err="1"/>
-              <a:t>connaître</a:t>
-            </a:r>
-            <a:r>
-              <a:rPr lang="en-GB" altLang="fr-FR" dirty="0"/>
-              <a:t> </a:t>
-            </a:r>
-            <a:r>
-              <a:rPr lang="en-GB" altLang="fr-FR" dirty="0" err="1"/>
-              <a:t>sa</a:t>
-            </a:r>
-            <a:r>
-              <a:rPr lang="en-GB" altLang="fr-FR" dirty="0"/>
-              <a:t> </a:t>
-            </a:r>
-            <a:r>
-              <a:rPr lang="en-GB" altLang="fr-FR" dirty="0" err="1"/>
-              <a:t>longueur</a:t>
-            </a:r>
-            <a:r>
-              <a:rPr lang="en-GB" altLang="fr-FR" dirty="0"/>
-              <a:t> on </a:t>
-            </a:r>
-            <a:r>
-              <a:rPr lang="en-GB" altLang="fr-FR" dirty="0" err="1"/>
-              <a:t>peut</a:t>
-            </a:r>
-            <a:r>
-              <a:rPr lang="en-GB" altLang="fr-FR" dirty="0"/>
-              <a:t> utiliser </a:t>
-            </a:r>
-            <a:r>
-              <a:rPr lang="en-GB" altLang="fr-FR" b="1" dirty="0" err="1"/>
-              <a:t>len</a:t>
-            </a:r>
-            <a:r>
-              <a:rPr lang="en-GB" altLang="fr-FR" b="1" dirty="0"/>
-              <a:t>(</a:t>
-            </a:r>
-            <a:r>
-              <a:rPr lang="en-GB" altLang="fr-FR" dirty="0"/>
-              <a:t> </a:t>
-            </a:r>
-            <a:r>
-              <a:rPr lang="en-GB" altLang="fr-FR" b="1" dirty="0"/>
-              <a:t>)</a:t>
-            </a:r>
-            <a:r>
-              <a:rPr lang="en-GB" altLang="fr-FR" dirty="0"/>
-              <a:t>.</a:t>
-            </a:r>
-          </a:p>
-          <a:p>
-            <a:pPr>
-              <a:lnSpc>
-                <a:spcPct val="90000"/>
-              </a:lnSpc>
-            </a:pPr>
-            <a:r>
-              <a:rPr lang="en-GB" altLang="fr-FR" dirty="0" err="1"/>
-              <a:t>Caractère</a:t>
-            </a:r>
-            <a:r>
-              <a:rPr lang="en-GB" altLang="fr-FR" dirty="0"/>
-              <a:t> </a:t>
-            </a:r>
-            <a:r>
-              <a:rPr lang="en-GB" altLang="fr-FR" dirty="0" err="1"/>
-              <a:t>d’échappement</a:t>
-            </a:r>
-            <a:r>
-              <a:rPr lang="en-GB" altLang="fr-FR" dirty="0"/>
-              <a:t> : \</a:t>
+            <a:r>
+              <a:rPr lang="fr-FR" dirty="0"/>
+              <a:t>Permutation de 2 variables</a:t>
+            </a:r>
+          </a:p>
+          <a:p>
+            <a:pPr lvl="1"/>
+            <a:r>
+              <a:rPr lang="fr-FR" dirty="0" err="1"/>
+              <a:t>a,b</a:t>
+            </a:r>
+            <a:r>
+              <a:rPr lang="fr-FR" dirty="0"/>
+              <a:t> = </a:t>
+            </a:r>
+            <a:r>
+              <a:rPr lang="fr-FR" dirty="0" err="1"/>
+              <a:t>b,a</a:t>
+            </a:r>
+            <a:endParaRPr lang="fr-FR" dirty="0"/>
+          </a:p>
+          <a:p>
+            <a:r>
+              <a:rPr lang="fr-FR" dirty="0"/>
+              <a:t>Affectation multiple</a:t>
+            </a:r>
+          </a:p>
+          <a:p>
+            <a:pPr lvl="1"/>
+            <a:r>
+              <a:rPr lang="fr-FR" dirty="0"/>
+              <a:t>a = b = 3</a:t>
+            </a:r>
+          </a:p>
+          <a:p>
+            <a:r>
+              <a:rPr lang="fr-FR" dirty="0"/>
+              <a:t>Ecriture sur plusieurs lignes</a:t>
+            </a:r>
+          </a:p>
+          <a:p>
+            <a:pPr lvl="1"/>
+            <a:r>
+              <a:rPr lang="fr-FR" dirty="0"/>
+              <a:t>1 + 2 + 3 \</a:t>
+            </a:r>
+          </a:p>
+          <a:p>
+            <a:pPr lvl="1"/>
+            <a:r>
+              <a:rPr lang="fr-FR" dirty="0"/>
+              <a:t>+ 4</a:t>
             </a:r>
           </a:p>
           <a:p>
@@ -4068,7 +3891,7 @@
     </p:spTree>
     <p:extLst>
       <p:ext uri="{BB962C8B-B14F-4D97-AF65-F5344CB8AC3E}">
-        <p14:creationId xmlns:p14="http://schemas.microsoft.com/office/powerpoint/2010/main" val="2952693403"/>
+        <p14:creationId xmlns:p14="http://schemas.microsoft.com/office/powerpoint/2010/main" val="1674420070"/>
       </p:ext>
     </p:extLst>
   </p:cSld>
@@ -4112,7 +3935,7 @@
           <a:p>
             <a:r>
               <a:rPr lang="fr-FR" dirty="0"/>
-              <a:t>Astuces</a:t>
+              <a:t>Les premières fonctions</a:t>
             </a:r>
           </a:p>
         </p:txBody>
@@ -4134,67 +3957,63 @@
           <a:p>
             <a:r>
               <a:rPr lang="fr-FR" dirty="0"/>
-              <a:t>Permutation de 2 variables</a:t>
+              <a:t>Une fonction contient un nom, des paramètres entre parenthèse et un retour</a:t>
+            </a:r>
+          </a:p>
+          <a:p>
+            <a:r>
+              <a:rPr lang="fr-FR" dirty="0"/>
+              <a:t>type()</a:t>
             </a:r>
           </a:p>
           <a:p>
             <a:pPr lvl="1"/>
             <a:r>
+              <a:rPr lang="fr-FR" dirty="0"/>
+              <a:t>Renvoie le type de la variable</a:t>
+            </a:r>
+          </a:p>
+          <a:p>
+            <a:pPr lvl="1"/>
+            <a:r>
+              <a:rPr lang="fr-FR" dirty="0"/>
+              <a:t>type(3.14)</a:t>
+            </a:r>
+          </a:p>
+          <a:p>
+            <a:r>
               <a:rPr lang="fr-FR" dirty="0" err="1"/>
-              <a:t>a,b</a:t>
-            </a:r>
-            <a:r>
-              <a:rPr lang="fr-FR" dirty="0"/>
-              <a:t> = </a:t>
-            </a:r>
+              <a:t>print</a:t>
+            </a:r>
+            <a:r>
+              <a:rPr lang="fr-FR" dirty="0"/>
+              <a:t>()</a:t>
+            </a:r>
+          </a:p>
+          <a:p>
+            <a:pPr lvl="1"/>
+            <a:r>
+              <a:rPr lang="fr-FR" dirty="0"/>
+              <a:t>Affiche une variable</a:t>
+            </a:r>
+          </a:p>
+          <a:p>
+            <a:pPr lvl="1"/>
             <a:r>
               <a:rPr lang="fr-FR" dirty="0" err="1"/>
-              <a:t>b,a</a:t>
-            </a:r>
-            <a:endParaRPr lang="fr-FR" dirty="0"/>
-          </a:p>
-          <a:p>
-            <a:r>
-              <a:rPr lang="fr-FR" dirty="0"/>
-              <a:t>Affectation multiple</a:t>
-            </a:r>
-          </a:p>
-          <a:p>
-            <a:pPr lvl="1"/>
-            <a:r>
-              <a:rPr lang="fr-FR" dirty="0"/>
-              <a:t>a = b = 3</a:t>
-            </a:r>
-          </a:p>
-          <a:p>
-            <a:r>
-              <a:rPr lang="fr-FR" dirty="0"/>
-              <a:t>Ecriture sur plusieurs lignes</a:t>
-            </a:r>
-          </a:p>
-          <a:p>
-            <a:pPr lvl="1"/>
-            <a:r>
-              <a:rPr lang="fr-FR" dirty="0"/>
-              <a:t>1 + 2 + 3 \</a:t>
-            </a:r>
-          </a:p>
-          <a:p>
-            <a:pPr lvl="1"/>
-            <a:r>
-              <a:rPr lang="fr-FR" dirty="0"/>
-              <a:t>+ 4</a:t>
-            </a:r>
-          </a:p>
-          <a:p>
-            <a:endParaRPr lang="fr-FR" dirty="0"/>
+              <a:t>print</a:t>
+            </a:r>
+            <a:r>
+              <a:rPr lang="fr-FR" dirty="0"/>
+              <a:t>(a)</a:t>
+            </a:r>
           </a:p>
         </p:txBody>
       </p:sp>
     </p:spTree>
     <p:extLst>
       <p:ext uri="{BB962C8B-B14F-4D97-AF65-F5344CB8AC3E}">
-        <p14:creationId xmlns:p14="http://schemas.microsoft.com/office/powerpoint/2010/main" val="1674420070"/>
+        <p14:creationId xmlns:p14="http://schemas.microsoft.com/office/powerpoint/2010/main" val="4016214150"/>
       </p:ext>
     </p:extLst>
   </p:cSld>
@@ -4265,128 +4084,6 @@
           </a:p>
           <a:p>
             <a:r>
-              <a:rPr lang="fr-FR" dirty="0"/>
-              <a:t>type()</a:t>
-            </a:r>
-          </a:p>
-          <a:p>
-            <a:pPr lvl="1"/>
-            <a:r>
-              <a:rPr lang="fr-FR" dirty="0"/>
-              <a:t>Renvoie le type de la variable</a:t>
-            </a:r>
-          </a:p>
-          <a:p>
-            <a:pPr lvl="1"/>
-            <a:r>
-              <a:rPr lang="fr-FR" dirty="0"/>
-              <a:t>type(3.14)</a:t>
-            </a:r>
-          </a:p>
-          <a:p>
-            <a:r>
-              <a:rPr lang="fr-FR" dirty="0" err="1"/>
-              <a:t>print</a:t>
-            </a:r>
-            <a:r>
-              <a:rPr lang="fr-FR" dirty="0"/>
-              <a:t>()</a:t>
-            </a:r>
-          </a:p>
-          <a:p>
-            <a:pPr lvl="1"/>
-            <a:r>
-              <a:rPr lang="fr-FR" dirty="0"/>
-              <a:t>Affiche une variable</a:t>
-            </a:r>
-          </a:p>
-          <a:p>
-            <a:pPr lvl="1"/>
-            <a:r>
-              <a:rPr lang="fr-FR" dirty="0" err="1"/>
-              <a:t>print</a:t>
-            </a:r>
-            <a:r>
-              <a:rPr lang="fr-FR" dirty="0"/>
-              <a:t>(a)</a:t>
-            </a:r>
-          </a:p>
-        </p:txBody>
-      </p:sp>
-    </p:spTree>
-    <p:extLst>
-      <p:ext uri="{BB962C8B-B14F-4D97-AF65-F5344CB8AC3E}">
-        <p14:creationId xmlns:p14="http://schemas.microsoft.com/office/powerpoint/2010/main" val="4016214150"/>
-      </p:ext>
-    </p:extLst>
-  </p:cSld>
-  <p:clrMapOvr>
-    <a:masterClrMapping/>
-  </p:clrMapOvr>
-</p:sld>
-</file>
-
-<file path=ppt/slides/slide13.xml><?xml version="1.0" encoding="utf-8"?>
-<p:sld xmlns:a="http://schemas.openxmlformats.org/drawingml/2006/main" xmlns:r="http://schemas.openxmlformats.org/officeDocument/2006/relationships" xmlns:p="http://schemas.openxmlformats.org/presentationml/2006/main">
-  <p:cSld>
-    <p:spTree>
-      <p:nvGrpSpPr>
-        <p:cNvPr id="1" name=""/>
-        <p:cNvGrpSpPr/>
-        <p:nvPr/>
-      </p:nvGrpSpPr>
-      <p:grpSpPr>
-        <a:xfrm>
-          <a:off x="0" y="0"/>
-          <a:ext cx="0" cy="0"/>
-          <a:chOff x="0" y="0"/>
-          <a:chExt cx="0" cy="0"/>
-        </a:xfrm>
-      </p:grpSpPr>
-      <p:sp>
-        <p:nvSpPr>
-          <p:cNvPr id="2" name="Titre 1"/>
-          <p:cNvSpPr>
-            <a:spLocks noGrp="1"/>
-          </p:cNvSpPr>
-          <p:nvPr>
-            <p:ph type="title"/>
-          </p:nvPr>
-        </p:nvSpPr>
-        <p:spPr/>
-        <p:txBody>
-          <a:bodyPr/>
-          <a:lstStyle/>
-          <a:p>
-            <a:r>
-              <a:rPr lang="fr-FR" dirty="0"/>
-              <a:t>Les premières fonctions</a:t>
-            </a:r>
-          </a:p>
-        </p:txBody>
-      </p:sp>
-      <p:sp>
-        <p:nvSpPr>
-          <p:cNvPr id="3" name="Espace réservé du contenu 2"/>
-          <p:cNvSpPr>
-            <a:spLocks noGrp="1"/>
-          </p:cNvSpPr>
-          <p:nvPr>
-            <p:ph idx="1"/>
-          </p:nvPr>
-        </p:nvSpPr>
-        <p:spPr/>
-        <p:txBody>
-          <a:bodyPr/>
-          <a:lstStyle/>
-          <a:p>
-            <a:r>
-              <a:rPr lang="fr-FR" dirty="0"/>
-              <a:t>Une fonction contient un nom, des paramètres entre parenthèse et un retour</a:t>
-            </a:r>
-          </a:p>
-          <a:p>
-            <a:r>
               <a:rPr lang="fr-FR" dirty="0" err="1"/>
               <a:t>len</a:t>
             </a:r>
@@ -4478,7 +4175,7 @@
 </p:sld>
 </file>
 
-<file path=ppt/slides/slide14.xml><?xml version="1.0" encoding="utf-8"?>
+<file path=ppt/slides/slide13.xml><?xml version="1.0" encoding="utf-8"?>
 <p:sld xmlns:a="http://schemas.openxmlformats.org/drawingml/2006/main" xmlns:r="http://schemas.openxmlformats.org/officeDocument/2006/relationships" xmlns:p="http://schemas.openxmlformats.org/presentationml/2006/main">
   <p:cSld>
     <p:spTree>
@@ -4638,7 +4335,7 @@
 </p:sld>
 </file>
 
-<file path=ppt/slides/slide15.xml><?xml version="1.0" encoding="utf-8"?>
+<file path=ppt/slides/slide14.xml><?xml version="1.0" encoding="utf-8"?>
 <p:sld xmlns:a="http://schemas.openxmlformats.org/drawingml/2006/main" xmlns:r="http://schemas.openxmlformats.org/officeDocument/2006/relationships" xmlns:p="http://schemas.openxmlformats.org/presentationml/2006/main">
   <p:cSld>
     <p:spTree>
@@ -4730,586 +4427,7 @@
 </p:sld>
 </file>
 
-<file path=ppt/slides/slide16.xml><?xml version="1.0" encoding="utf-8"?>
-<p:sld xmlns:a="http://schemas.openxmlformats.org/drawingml/2006/main" xmlns:r="http://schemas.openxmlformats.org/officeDocument/2006/relationships" xmlns:p="http://schemas.openxmlformats.org/presentationml/2006/main">
-  <p:cSld>
-    <p:spTree>
-      <p:nvGrpSpPr>
-        <p:cNvPr id="1" name=""/>
-        <p:cNvGrpSpPr/>
-        <p:nvPr/>
-      </p:nvGrpSpPr>
-      <p:grpSpPr>
-        <a:xfrm>
-          <a:off x="0" y="0"/>
-          <a:ext cx="0" cy="0"/>
-          <a:chOff x="0" y="0"/>
-          <a:chExt cx="0" cy="0"/>
-        </a:xfrm>
-      </p:grpSpPr>
-      <p:sp>
-        <p:nvSpPr>
-          <p:cNvPr id="2" name="Titre 1"/>
-          <p:cNvSpPr>
-            <a:spLocks noGrp="1"/>
-          </p:cNvSpPr>
-          <p:nvPr>
-            <p:ph type="title"/>
-          </p:nvPr>
-        </p:nvSpPr>
-        <p:spPr/>
-        <p:txBody>
-          <a:bodyPr/>
-          <a:lstStyle/>
-          <a:p>
-            <a:r>
-              <a:rPr lang="fr-FR" dirty="0" err="1"/>
-              <a:t>Indiçage</a:t>
-            </a:r>
-            <a:r>
-              <a:rPr lang="fr-FR" dirty="0"/>
-              <a:t> des chaînes</a:t>
-            </a:r>
-          </a:p>
-        </p:txBody>
-      </p:sp>
-      <p:sp>
-        <p:nvSpPr>
-          <p:cNvPr id="3" name="Espace réservé du contenu 2"/>
-          <p:cNvSpPr>
-            <a:spLocks noGrp="1"/>
-          </p:cNvSpPr>
-          <p:nvPr>
-            <p:ph idx="1"/>
-          </p:nvPr>
-        </p:nvSpPr>
-        <p:spPr/>
-        <p:txBody>
-          <a:bodyPr/>
-          <a:lstStyle/>
-          <a:p>
-            <a:r>
-              <a:rPr lang="en-GB" altLang="fr-FR" u="sng" dirty="0" err="1"/>
-              <a:t>Représentation</a:t>
-            </a:r>
-            <a:r>
-              <a:rPr lang="en-GB" altLang="fr-FR" u="sng" dirty="0"/>
-              <a:t> </a:t>
-            </a:r>
-            <a:r>
-              <a:rPr lang="en-GB" altLang="fr-FR" u="sng" dirty="0" err="1"/>
-              <a:t>d’une</a:t>
-            </a:r>
-            <a:r>
-              <a:rPr lang="en-GB" altLang="fr-FR" u="sng" dirty="0"/>
-              <a:t> </a:t>
-            </a:r>
-            <a:r>
-              <a:rPr lang="en-GB" altLang="fr-FR" u="sng" dirty="0" err="1"/>
-              <a:t>chaîne</a:t>
-            </a:r>
-            <a:r>
-              <a:rPr lang="en-GB" altLang="fr-FR" b="1" u="sng" dirty="0" err="1"/>
-              <a:t>s</a:t>
-            </a:r>
-            <a:r>
-              <a:rPr lang="en-GB" altLang="fr-FR" u="sng" dirty="0"/>
-              <a:t>:</a:t>
-            </a:r>
-          </a:p>
-          <a:p>
-            <a:endParaRPr lang="en-GB" altLang="fr-FR" u="sng" dirty="0"/>
-          </a:p>
-          <a:p>
-            <a:endParaRPr lang="en-GB" altLang="fr-FR" u="sng" dirty="0"/>
-          </a:p>
-          <a:p>
-            <a:pPr>
-              <a:buFontTx/>
-              <a:buNone/>
-            </a:pPr>
-            <a:endParaRPr lang="en-GB" altLang="fr-FR" u="sng" dirty="0"/>
-          </a:p>
-          <a:p>
-            <a:r>
-              <a:rPr lang="en-GB" altLang="fr-FR" dirty="0"/>
-              <a:t>Un </a:t>
-            </a:r>
-            <a:r>
-              <a:rPr lang="en-GB" altLang="fr-FR" dirty="0" err="1"/>
-              <a:t>indice</a:t>
-            </a:r>
-            <a:r>
-              <a:rPr lang="en-GB" altLang="fr-FR" dirty="0"/>
-              <a:t> </a:t>
-            </a:r>
-            <a:r>
-              <a:rPr lang="en-GB" altLang="fr-FR" dirty="0" err="1"/>
-              <a:t>positif</a:t>
-            </a:r>
-            <a:r>
-              <a:rPr lang="en-GB" altLang="fr-FR" dirty="0"/>
-              <a:t> </a:t>
-            </a:r>
-            <a:r>
-              <a:rPr lang="en-GB" altLang="fr-FR" dirty="0" err="1"/>
-              <a:t>indique</a:t>
-            </a:r>
-            <a:r>
-              <a:rPr lang="en-GB" altLang="fr-FR" dirty="0"/>
-              <a:t> que </a:t>
-            </a:r>
-            <a:r>
-              <a:rPr lang="en-GB" altLang="fr-FR" dirty="0" err="1"/>
-              <a:t>l’on</a:t>
-            </a:r>
-            <a:r>
-              <a:rPr lang="en-GB" altLang="fr-FR" dirty="0"/>
-              <a:t> commence à </a:t>
-            </a:r>
-            <a:r>
-              <a:rPr lang="en-GB" altLang="fr-FR" dirty="0" err="1"/>
-              <a:t>compter</a:t>
-            </a:r>
-            <a:r>
-              <a:rPr lang="en-GB" altLang="fr-FR" dirty="0"/>
-              <a:t> par la gauche et un </a:t>
-            </a:r>
-            <a:r>
-              <a:rPr lang="en-GB" altLang="fr-FR" dirty="0" err="1"/>
-              <a:t>indice</a:t>
-            </a:r>
-            <a:r>
-              <a:rPr lang="en-GB" altLang="fr-FR" dirty="0"/>
-              <a:t> </a:t>
-            </a:r>
-            <a:r>
-              <a:rPr lang="en-GB" altLang="fr-FR" dirty="0" err="1"/>
-              <a:t>négatif</a:t>
-            </a:r>
-            <a:r>
-              <a:rPr lang="en-GB" altLang="fr-FR" dirty="0"/>
-              <a:t> que </a:t>
-            </a:r>
-            <a:r>
-              <a:rPr lang="en-GB" altLang="fr-FR" dirty="0" err="1"/>
-              <a:t>l’on</a:t>
-            </a:r>
-            <a:r>
-              <a:rPr lang="en-GB" altLang="fr-FR" dirty="0"/>
-              <a:t> </a:t>
-            </a:r>
-            <a:r>
-              <a:rPr lang="en-GB" altLang="fr-FR" dirty="0" err="1"/>
-              <a:t>compte</a:t>
-            </a:r>
-            <a:r>
-              <a:rPr lang="en-GB" altLang="fr-FR" dirty="0"/>
-              <a:t> </a:t>
-            </a:r>
-            <a:r>
-              <a:rPr lang="en-GB" altLang="fr-FR" dirty="0" err="1"/>
-              <a:t>depuis</a:t>
-            </a:r>
-            <a:r>
-              <a:rPr lang="en-GB" altLang="fr-FR" dirty="0"/>
-              <a:t> la </a:t>
-            </a:r>
-            <a:r>
-              <a:rPr lang="en-GB" altLang="fr-FR" dirty="0" err="1"/>
-              <a:t>droite</a:t>
-            </a:r>
-            <a:endParaRPr lang="en-GB" altLang="fr-FR" u="sng" dirty="0"/>
-          </a:p>
-          <a:p>
-            <a:r>
-              <a:rPr lang="en-GB" altLang="fr-FR" dirty="0" err="1"/>
-              <a:t>l’extraction</a:t>
-            </a:r>
-            <a:r>
-              <a:rPr lang="en-GB" altLang="fr-FR" dirty="0"/>
-              <a:t> </a:t>
-            </a:r>
-            <a:r>
-              <a:rPr lang="en-GB" altLang="fr-FR" dirty="0" err="1"/>
-              <a:t>est</a:t>
-            </a:r>
-            <a:r>
-              <a:rPr lang="en-GB" altLang="fr-FR" dirty="0"/>
-              <a:t> le fait de </a:t>
-            </a:r>
-            <a:r>
-              <a:rPr lang="en-GB" altLang="fr-FR" dirty="0" err="1"/>
-              <a:t>sélectionner</a:t>
-            </a:r>
-            <a:r>
-              <a:rPr lang="en-GB" altLang="fr-FR" dirty="0"/>
-              <a:t> </a:t>
-            </a:r>
-            <a:r>
-              <a:rPr lang="en-GB" altLang="fr-FR" dirty="0" err="1"/>
-              <a:t>une</a:t>
-            </a:r>
-            <a:r>
-              <a:rPr lang="en-GB" altLang="fr-FR" dirty="0"/>
-              <a:t> </a:t>
-            </a:r>
-            <a:r>
-              <a:rPr lang="en-GB" altLang="fr-FR" dirty="0" err="1"/>
-              <a:t>partie</a:t>
-            </a:r>
-            <a:r>
-              <a:rPr lang="en-GB" altLang="fr-FR" dirty="0"/>
-              <a:t> de la </a:t>
-            </a:r>
-            <a:r>
-              <a:rPr lang="en-GB" altLang="fr-FR" dirty="0" err="1"/>
-              <a:t>chaîne</a:t>
-            </a:r>
-            <a:r>
-              <a:rPr lang="en-GB" altLang="fr-FR" dirty="0"/>
-              <a:t> </a:t>
-            </a:r>
-            <a:r>
-              <a:rPr lang="en-GB" altLang="fr-FR" dirty="0" err="1"/>
-              <a:t>ainsi</a:t>
-            </a:r>
-            <a:r>
-              <a:rPr lang="en-GB" altLang="fr-FR" dirty="0"/>
-              <a:t>, s[2:5] </a:t>
-            </a:r>
-            <a:r>
-              <a:rPr lang="en-GB" altLang="fr-FR" dirty="0" err="1"/>
-              <a:t>donnera</a:t>
-            </a:r>
-            <a:r>
-              <a:rPr lang="en-GB" altLang="fr-FR" dirty="0"/>
-              <a:t> ‘</a:t>
-            </a:r>
-            <a:r>
-              <a:rPr lang="en-GB" altLang="fr-FR" dirty="0" err="1"/>
-              <a:t>nex</a:t>
-            </a:r>
-            <a:r>
-              <a:rPr lang="en-GB" altLang="fr-FR" dirty="0"/>
-              <a:t>’ (le 5  </a:t>
-            </a:r>
-            <a:r>
-              <a:rPr lang="en-GB" altLang="fr-FR" dirty="0" err="1"/>
-              <a:t>n’est</a:t>
-            </a:r>
-            <a:r>
-              <a:rPr lang="en-GB" altLang="fr-FR" dirty="0"/>
-              <a:t> pas </a:t>
-            </a:r>
-            <a:r>
-              <a:rPr lang="en-GB" altLang="fr-FR" dirty="0" err="1"/>
-              <a:t>compris</a:t>
-            </a:r>
-            <a:r>
-              <a:rPr lang="en-GB" altLang="fr-FR" dirty="0"/>
-              <a:t>)	</a:t>
-            </a:r>
-          </a:p>
-          <a:p>
-            <a:endParaRPr lang="fr-FR" dirty="0"/>
-          </a:p>
-        </p:txBody>
-      </p:sp>
-      <p:pic>
-        <p:nvPicPr>
-          <p:cNvPr id="4" name="Picture 18" descr="D:\python\sv4884893.jpg"/>
-          <p:cNvPicPr>
-            <a:picLocks noChangeAspect="1" noChangeArrowheads="1"/>
-          </p:cNvPicPr>
-          <p:nvPr/>
-        </p:nvPicPr>
-        <p:blipFill>
-          <a:blip r:embed="rId2">
-            <a:clrChange>
-              <a:clrFrom>
-                <a:srgbClr val="FFFFFF"/>
-              </a:clrFrom>
-              <a:clrTo>
-                <a:srgbClr val="FFFFFF">
-                  <a:alpha val="0"/>
-                </a:srgbClr>
-              </a:clrTo>
-            </a:clrChange>
-            <a:extLst>
-              <a:ext uri="{28A0092B-C50C-407E-A947-70E740481C1C}">
-                <a14:useLocalDpi xmlns:a14="http://schemas.microsoft.com/office/drawing/2010/main" val="0"/>
-              </a:ext>
-            </a:extLst>
-          </a:blip>
-          <a:srcRect/>
-          <a:stretch>
-            <a:fillRect/>
-          </a:stretch>
-        </p:blipFill>
-        <p:spPr bwMode="auto">
-          <a:xfrm>
-            <a:off x="899592" y="1988840"/>
-            <a:ext cx="6934200" cy="1600200"/>
-          </a:xfrm>
-          <a:prstGeom prst="rect">
-            <a:avLst/>
-          </a:prstGeom>
-          <a:noFill/>
-          <a:extLst>
-            <a:ext uri="{909E8E84-426E-40DD-AFC4-6F175D3DCCD1}">
-              <a14:hiddenFill xmlns:a14="http://schemas.microsoft.com/office/drawing/2010/main">
-                <a:solidFill>
-                  <a:srgbClr val="FFFFFF"/>
-                </a:solidFill>
-              </a14:hiddenFill>
-            </a:ext>
-          </a:extLst>
-        </p:spPr>
-      </p:pic>
-    </p:spTree>
-    <p:extLst>
-      <p:ext uri="{BB962C8B-B14F-4D97-AF65-F5344CB8AC3E}">
-        <p14:creationId xmlns:p14="http://schemas.microsoft.com/office/powerpoint/2010/main" val="2880663148"/>
-      </p:ext>
-    </p:extLst>
-  </p:cSld>
-  <p:clrMapOvr>
-    <a:masterClrMapping/>
-  </p:clrMapOvr>
-  <p:timing>
-    <p:tnLst>
-      <p:par>
-        <p:cTn id="1" dur="indefinite" restart="never" nodeType="tmRoot">
-          <p:childTnLst>
-            <p:seq concurrent="1" nextAc="seek">
-              <p:cTn id="2" dur="indefinite" nodeType="mainSeq">
-                <p:childTnLst>
-                  <p:par>
-                    <p:cTn id="3" fill="hold">
-                      <p:stCondLst>
-                        <p:cond delay="indefinite"/>
-                        <p:cond evt="onBegin" delay="0">
-                          <p:tn val="2"/>
-                        </p:cond>
-                      </p:stCondLst>
-                      <p:childTnLst>
-                        <p:par>
-                          <p:cTn id="4" fill="hold">
-                            <p:stCondLst>
-                              <p:cond delay="0"/>
-                            </p:stCondLst>
-                            <p:childTnLst>
-                              <p:par>
-                                <p:cTn id="5" presetID="4" presetClass="entr" presetSubtype="32" fill="hold" nodeType="afterEffect">
-                                  <p:stCondLst>
-                                    <p:cond delay="0"/>
-                                  </p:stCondLst>
-                                  <p:childTnLst>
-                                    <p:set>
-                                      <p:cBhvr>
-                                        <p:cTn id="6" dur="1" fill="hold">
-                                          <p:stCondLst>
-                                            <p:cond delay="0"/>
-                                          </p:stCondLst>
-                                        </p:cTn>
-                                        <p:tgtEl>
-                                          <p:spTgt spid="4"/>
-                                        </p:tgtEl>
-                                        <p:attrNameLst>
-                                          <p:attrName>style.visibility</p:attrName>
-                                        </p:attrNameLst>
-                                      </p:cBhvr>
-                                      <p:to>
-                                        <p:strVal val="visible"/>
-                                      </p:to>
-                                    </p:set>
-                                    <p:animEffect transition="in" filter="box(out)">
-                                      <p:cBhvr>
-                                        <p:cTn id="7" dur="500"/>
-                                        <p:tgtEl>
-                                          <p:spTgt spid="4"/>
-                                        </p:tgtEl>
-                                      </p:cBhvr>
-                                    </p:animEffect>
-                                  </p:childTnLst>
-                                </p:cTn>
-                              </p:par>
-                            </p:childTnLst>
-                          </p:cTn>
-                        </p:par>
-                      </p:childTnLst>
-                    </p:cTn>
-                  </p:par>
-                </p:childTnLst>
-              </p:cTn>
-              <p:prevCondLst>
-                <p:cond evt="onPrev" delay="0">
-                  <p:tgtEl>
-                    <p:sldTgt/>
-                  </p:tgtEl>
-                </p:cond>
-              </p:prevCondLst>
-              <p:nextCondLst>
-                <p:cond evt="onNext" delay="0">
-                  <p:tgtEl>
-                    <p:sldTgt/>
-                  </p:tgtEl>
-                </p:cond>
-              </p:nextCondLst>
-            </p:seq>
-          </p:childTnLst>
-        </p:cTn>
-      </p:par>
-    </p:tnLst>
-  </p:timing>
-</p:sld>
-</file>
-
-<file path=ppt/slides/slide17.xml><?xml version="1.0" encoding="utf-8"?>
-<p:sld xmlns:a="http://schemas.openxmlformats.org/drawingml/2006/main" xmlns:r="http://schemas.openxmlformats.org/officeDocument/2006/relationships" xmlns:p="http://schemas.openxmlformats.org/presentationml/2006/main">
-  <p:cSld>
-    <p:spTree>
-      <p:nvGrpSpPr>
-        <p:cNvPr id="1" name=""/>
-        <p:cNvGrpSpPr/>
-        <p:nvPr/>
-      </p:nvGrpSpPr>
-      <p:grpSpPr>
-        <a:xfrm>
-          <a:off x="0" y="0"/>
-          <a:ext cx="0" cy="0"/>
-          <a:chOff x="0" y="0"/>
-          <a:chExt cx="0" cy="0"/>
-        </a:xfrm>
-      </p:grpSpPr>
-      <p:sp>
-        <p:nvSpPr>
-          <p:cNvPr id="2" name="Titre 1"/>
-          <p:cNvSpPr>
-            <a:spLocks noGrp="1"/>
-          </p:cNvSpPr>
-          <p:nvPr>
-            <p:ph type="title"/>
-          </p:nvPr>
-        </p:nvSpPr>
-        <p:spPr/>
-        <p:txBody>
-          <a:bodyPr/>
-          <a:lstStyle/>
-          <a:p>
-            <a:r>
-              <a:rPr lang="fr-FR" dirty="0"/>
-              <a:t>Chaînes et listes</a:t>
-            </a:r>
-          </a:p>
-        </p:txBody>
-      </p:sp>
-      <p:sp>
-        <p:nvSpPr>
-          <p:cNvPr id="3" name="Espace réservé du contenu 2"/>
-          <p:cNvSpPr>
-            <a:spLocks noGrp="1"/>
-          </p:cNvSpPr>
-          <p:nvPr>
-            <p:ph idx="1"/>
-          </p:nvPr>
-        </p:nvSpPr>
-        <p:spPr/>
-        <p:txBody>
-          <a:bodyPr/>
-          <a:lstStyle/>
-          <a:p>
-            <a:r>
-              <a:rPr lang="fr-FR" dirty="0"/>
-              <a:t>Les chaînes se comportent comme des listes</a:t>
-            </a:r>
-          </a:p>
-          <a:p>
-            <a:pPr lvl="1"/>
-            <a:r>
-              <a:rPr lang="fr-FR" dirty="0"/>
-              <a:t>Mais non modifiable</a:t>
-            </a:r>
-          </a:p>
-          <a:p>
-            <a:pPr lvl="1"/>
-            <a:r>
-              <a:rPr lang="fr-FR" dirty="0"/>
-              <a:t>Possède les mêmes opérateurs</a:t>
-            </a:r>
-          </a:p>
-          <a:p>
-            <a:pPr lvl="1"/>
-            <a:r>
-              <a:rPr lang="fr-FR" dirty="0"/>
-              <a:t>Voir chapitre sur les types complexes</a:t>
-            </a:r>
-          </a:p>
-        </p:txBody>
-      </p:sp>
-      <p:pic>
-        <p:nvPicPr>
-          <p:cNvPr id="4" name="Image 3"/>
-          <p:cNvPicPr>
-            <a:picLocks noChangeAspect="1"/>
-          </p:cNvPicPr>
-          <p:nvPr/>
-        </p:nvPicPr>
-        <p:blipFill>
-          <a:blip r:embed="rId2"/>
-          <a:stretch>
-            <a:fillRect/>
-          </a:stretch>
-        </p:blipFill>
-        <p:spPr>
-          <a:xfrm>
-            <a:off x="630565" y="3356992"/>
-            <a:ext cx="7863943" cy="1152128"/>
-          </a:xfrm>
-          <a:prstGeom prst="rect">
-            <a:avLst/>
-          </a:prstGeom>
-        </p:spPr>
-      </p:pic>
-      <p:pic>
-        <p:nvPicPr>
-          <p:cNvPr id="5" name="Image 4"/>
-          <p:cNvPicPr>
-            <a:picLocks noChangeAspect="1"/>
-          </p:cNvPicPr>
-          <p:nvPr/>
-        </p:nvPicPr>
-        <p:blipFill>
-          <a:blip r:embed="rId3"/>
-          <a:stretch>
-            <a:fillRect/>
-          </a:stretch>
-        </p:blipFill>
-        <p:spPr>
-          <a:xfrm>
-            <a:off x="1979712" y="4653136"/>
-            <a:ext cx="4463070" cy="1440160"/>
-          </a:xfrm>
-          <a:prstGeom prst="rect">
-            <a:avLst/>
-          </a:prstGeom>
-        </p:spPr>
-      </p:pic>
-    </p:spTree>
-    <p:extLst>
-      <p:ext uri="{BB962C8B-B14F-4D97-AF65-F5344CB8AC3E}">
-        <p14:creationId xmlns:p14="http://schemas.microsoft.com/office/powerpoint/2010/main" val="1077602460"/>
-      </p:ext>
-    </p:extLst>
-  </p:cSld>
-  <p:clrMapOvr>
-    <a:masterClrMapping/>
-  </p:clrMapOvr>
-</p:sld>
-</file>
-
-<file path=ppt/slides/slide18.xml><?xml version="1.0" encoding="utf-8"?>
+<file path=ppt/slides/slide15.xml><?xml version="1.0" encoding="utf-8"?>
 <p:sld xmlns:a="http://schemas.openxmlformats.org/drawingml/2006/main" xmlns:r="http://schemas.openxmlformats.org/officeDocument/2006/relationships" xmlns:p="http://schemas.openxmlformats.org/presentationml/2006/main">
   <p:cSld>
     <p:spTree>
@@ -6478,7 +5596,7 @@
           <a:p>
             <a:r>
               <a:rPr lang="fr-FR" dirty="0"/>
-              <a:t>Remarques</a:t>
+              <a:t>String</a:t>
             </a:r>
           </a:p>
         </p:txBody>
@@ -6498,17 +5616,243 @@
           <a:bodyPr/>
           <a:lstStyle/>
           <a:p>
-            <a:r>
-              <a:rPr lang="fr-FR" dirty="0"/>
-              <a:t>Lors de mélange de types numériques lors d’une opération, la réponse sera du type de l’opérande la plus complexe.		</a:t>
-            </a:r>
+            <a:pPr>
+              <a:lnSpc>
+                <a:spcPct val="90000"/>
+              </a:lnSpc>
+            </a:pPr>
+            <a:r>
+              <a:rPr lang="en-GB" altLang="fr-FR" dirty="0" err="1"/>
+              <a:t>Une</a:t>
+            </a:r>
+            <a:r>
+              <a:rPr lang="en-GB" altLang="fr-FR" dirty="0"/>
+              <a:t> </a:t>
+            </a:r>
+            <a:r>
+              <a:rPr lang="en-GB" altLang="fr-FR" dirty="0" err="1"/>
+              <a:t>chaîne</a:t>
+            </a:r>
+            <a:r>
+              <a:rPr lang="en-GB" altLang="fr-FR" dirty="0"/>
+              <a:t> </a:t>
+            </a:r>
+            <a:r>
+              <a:rPr lang="en-GB" altLang="fr-FR" dirty="0" err="1"/>
+              <a:t>peut</a:t>
+            </a:r>
+            <a:r>
+              <a:rPr lang="en-GB" altLang="fr-FR" dirty="0"/>
+              <a:t> </a:t>
+            </a:r>
+            <a:r>
+              <a:rPr lang="en-GB" altLang="fr-FR" dirty="0" err="1"/>
+              <a:t>être</a:t>
+            </a:r>
+            <a:r>
+              <a:rPr lang="en-GB" altLang="fr-FR" dirty="0"/>
+              <a:t> </a:t>
+            </a:r>
+            <a:r>
+              <a:rPr lang="en-GB" altLang="fr-FR" dirty="0" err="1"/>
+              <a:t>déclarée</a:t>
+            </a:r>
+            <a:r>
+              <a:rPr lang="en-GB" altLang="fr-FR" dirty="0"/>
+              <a:t> avec un simple guillemet </a:t>
+            </a:r>
+            <a:r>
+              <a:rPr lang="en-GB" altLang="fr-FR" dirty="0" err="1"/>
+              <a:t>ou</a:t>
+            </a:r>
+            <a:r>
+              <a:rPr lang="en-GB" altLang="fr-FR" dirty="0"/>
+              <a:t> un double.</a:t>
+            </a:r>
+          </a:p>
+          <a:p>
+            <a:pPr lvl="1">
+              <a:lnSpc>
+                <a:spcPct val="90000"/>
+              </a:lnSpc>
+            </a:pPr>
+            <a:r>
+              <a:rPr lang="en-GB" altLang="fr-FR" dirty="0"/>
+              <a:t>On utilise le triple double quotes (“”” … “””) pour </a:t>
+            </a:r>
+            <a:r>
+              <a:rPr lang="en-GB" altLang="fr-FR" dirty="0" err="1"/>
+              <a:t>entrer</a:t>
+            </a:r>
+            <a:r>
+              <a:rPr lang="en-GB" altLang="fr-FR" dirty="0"/>
+              <a:t> </a:t>
+            </a:r>
+            <a:r>
+              <a:rPr lang="en-GB" altLang="fr-FR" dirty="0" err="1"/>
+              <a:t>une</a:t>
+            </a:r>
+            <a:r>
+              <a:rPr lang="en-GB" altLang="fr-FR" dirty="0"/>
+              <a:t> </a:t>
+            </a:r>
+            <a:r>
+              <a:rPr lang="en-GB" altLang="fr-FR" dirty="0" err="1"/>
+              <a:t>chaîne</a:t>
+            </a:r>
+            <a:r>
+              <a:rPr lang="en-GB" altLang="fr-FR" dirty="0"/>
+              <a:t> de </a:t>
+            </a:r>
+            <a:r>
+              <a:rPr lang="en-GB" altLang="fr-FR" dirty="0" err="1"/>
+              <a:t>caractère</a:t>
+            </a:r>
+            <a:r>
+              <a:rPr lang="en-GB" altLang="fr-FR" dirty="0"/>
+              <a:t> sur </a:t>
+            </a:r>
+            <a:r>
+              <a:rPr lang="en-GB" altLang="fr-FR" dirty="0" err="1"/>
+              <a:t>plusieurs</a:t>
+            </a:r>
+            <a:r>
+              <a:rPr lang="en-GB" altLang="fr-FR" dirty="0"/>
+              <a:t> </a:t>
+            </a:r>
+            <a:r>
+              <a:rPr lang="en-GB" altLang="fr-FR" dirty="0" err="1"/>
+              <a:t>lignes</a:t>
+            </a:r>
+            <a:endParaRPr lang="en-GB" altLang="fr-FR" dirty="0"/>
+          </a:p>
+          <a:p>
+            <a:pPr>
+              <a:lnSpc>
+                <a:spcPct val="90000"/>
+              </a:lnSpc>
+            </a:pPr>
+            <a:r>
+              <a:rPr lang="en-GB" altLang="fr-FR" dirty="0"/>
+              <a:t>On ne </a:t>
+            </a:r>
+            <a:r>
+              <a:rPr lang="en-GB" altLang="fr-FR" dirty="0" err="1"/>
+              <a:t>déclare</a:t>
+            </a:r>
+            <a:r>
+              <a:rPr lang="en-GB" altLang="fr-FR" dirty="0"/>
+              <a:t> </a:t>
+            </a:r>
+            <a:r>
+              <a:rPr lang="en-GB" altLang="fr-FR" dirty="0" err="1"/>
+              <a:t>donc</a:t>
+            </a:r>
+            <a:r>
+              <a:rPr lang="en-GB" altLang="fr-FR" dirty="0"/>
+              <a:t> pas la </a:t>
+            </a:r>
+            <a:r>
+              <a:rPr lang="en-GB" altLang="fr-FR" dirty="0" err="1"/>
+              <a:t>taille</a:t>
+            </a:r>
+            <a:r>
+              <a:rPr lang="en-GB" altLang="fr-FR" dirty="0"/>
+              <a:t> de la </a:t>
+            </a:r>
+            <a:r>
+              <a:rPr lang="en-GB" altLang="fr-FR" dirty="0" err="1"/>
+              <a:t>chaîne</a:t>
+            </a:r>
+            <a:r>
+              <a:rPr lang="en-GB" altLang="fr-FR" dirty="0"/>
+              <a:t> et pour </a:t>
+            </a:r>
+            <a:r>
+              <a:rPr lang="en-GB" altLang="fr-FR" dirty="0" err="1"/>
+              <a:t>connaître</a:t>
+            </a:r>
+            <a:r>
+              <a:rPr lang="en-GB" altLang="fr-FR" dirty="0"/>
+              <a:t> </a:t>
+            </a:r>
+            <a:r>
+              <a:rPr lang="en-GB" altLang="fr-FR" dirty="0" err="1"/>
+              <a:t>sa</a:t>
+            </a:r>
+            <a:r>
+              <a:rPr lang="en-GB" altLang="fr-FR" dirty="0"/>
+              <a:t> </a:t>
+            </a:r>
+            <a:r>
+              <a:rPr lang="en-GB" altLang="fr-FR" dirty="0" err="1"/>
+              <a:t>longueur</a:t>
+            </a:r>
+            <a:r>
+              <a:rPr lang="en-GB" altLang="fr-FR" dirty="0"/>
+              <a:t> on </a:t>
+            </a:r>
+            <a:r>
+              <a:rPr lang="en-GB" altLang="fr-FR" dirty="0" err="1"/>
+              <a:t>peut</a:t>
+            </a:r>
+            <a:r>
+              <a:rPr lang="en-GB" altLang="fr-FR" dirty="0"/>
+              <a:t> utiliser </a:t>
+            </a:r>
+            <a:r>
+              <a:rPr lang="en-GB" altLang="fr-FR" b="1" dirty="0" err="1"/>
+              <a:t>len</a:t>
+            </a:r>
+            <a:r>
+              <a:rPr lang="en-GB" altLang="fr-FR" b="1" dirty="0"/>
+              <a:t>(</a:t>
+            </a:r>
+            <a:r>
+              <a:rPr lang="en-GB" altLang="fr-FR" dirty="0"/>
+              <a:t> </a:t>
+            </a:r>
+            <a:r>
+              <a:rPr lang="en-GB" altLang="fr-FR" b="1" dirty="0"/>
+              <a:t>)</a:t>
+            </a:r>
+            <a:r>
+              <a:rPr lang="en-GB" altLang="fr-FR" dirty="0"/>
+              <a:t>.</a:t>
+            </a:r>
+          </a:p>
+          <a:p>
+            <a:pPr>
+              <a:lnSpc>
+                <a:spcPct val="90000"/>
+              </a:lnSpc>
+            </a:pPr>
+            <a:r>
+              <a:rPr lang="en-GB" altLang="fr-FR" dirty="0" err="1"/>
+              <a:t>Caractère</a:t>
+            </a:r>
+            <a:r>
+              <a:rPr lang="en-GB" altLang="fr-FR" dirty="0"/>
+              <a:t> </a:t>
+            </a:r>
+            <a:r>
+              <a:rPr lang="en-GB" altLang="fr-FR" dirty="0" err="1"/>
+              <a:t>d’échappement</a:t>
+            </a:r>
+            <a:r>
+              <a:rPr lang="en-GB" altLang="fr-FR" dirty="0"/>
+              <a:t> : \</a:t>
+            </a:r>
+          </a:p>
+          <a:p>
+            <a:endParaRPr lang="fr-FR" dirty="0"/>
           </a:p>
         </p:txBody>
       </p:sp>
     </p:spTree>
     <p:extLst>
       <p:ext uri="{BB962C8B-B14F-4D97-AF65-F5344CB8AC3E}">
-        <p14:creationId xmlns:p14="http://schemas.microsoft.com/office/powerpoint/2010/main" val="3210278199"/>
+        <p14:creationId xmlns:p14="http://schemas.microsoft.com/office/powerpoint/2010/main" val="2952693403"/>
       </p:ext>
     </p:extLst>
   </p:cSld>
